--- a/brand/ignite-search-deck-template.pptx
+++ b/brand/ignite-search-deck-template.pptx
@@ -111,27 +111,27 @@
   <p:extLst>
     <p:ext uri="{521415D9-36F7-43E2-AB2F-B90AF26B5E84}">
       <p14:sectionLst xmlns:p14="http://schemas.microsoft.com/office/powerpoint/2010/main">
-        <p14:section name="Cover" id="{a48ef490-0d50-d653-6eee-0bd7503327f5}">
+        <p14:section name="Cover" id="{378359f5-528a-6234-5529-7a8bc3344722}">
           <p14:sldIdLst>
             <p14:sldId id="256"/>
           </p14:sldIdLst>
         </p14:section>
-        <p14:section name="Divider" id="{7aa16a99-ebbc-f5a5-a4dc-484e67978587}">
+        <p14:section name="Divider" id="{086a098a-0f72-771b-1592-e1e5b4e4bc69}">
           <p14:sldIdLst>
             <p14:sldId id="257"/>
           </p14:sldIdLst>
         </p14:section>
-        <p14:section name="Content" id="{6a4026ee-2120-0be6-d951-37d1f62505cc}">
+        <p14:section name="Content" id="{324667da-d6de-88a5-453c-d83da31ef09b}">
           <p14:sldIdLst>
             <p14:sldId id="258"/>
           </p14:sldIdLst>
         </p14:section>
-        <p14:section name="Numbers" id="{eeb358d4-75aa-72e3-a94b-46e48b336cf5}">
+        <p14:section name="Numbers" id="{61e54c83-9c1d-3c2f-f4c8-5983f9d9e5e7}">
           <p14:sldIdLst>
             <p14:sldId id="259"/>
           </p14:sldIdLst>
         </p14:section>
-        <p14:section name="Close" id="{4d17ae4c-6933-2d59-1992-6e3893dcae57}">
+        <p14:section name="Close" id="{1eaee87f-0fc7-6088-ca9a-68396e531539}">
           <p14:sldIdLst>
             <p14:sldId id="260"/>
           </p14:sldIdLst>
@@ -1005,7 +1005,7 @@
         <p:spPr>
           <a:xfrm>
             <a:off x="658368" y="548640"/>
-            <a:ext cx="2192731" cy="726948"/>
+            <a:ext cx="2306117" cy="726948"/>
           </a:xfrm>
           <a:prstGeom prst="rect">
             <a:avLst/>
@@ -1144,7 +1144,7 @@
             <a:avLst/>
           </a:prstGeom>
           <a:solidFill>
-            <a:srgbClr val="F2D416"/>
+            <a:srgbClr val="F2D216"/>
           </a:solidFill>
           <a:ln/>
         </p:spPr>
@@ -1207,7 +1207,7 @@
               <a:buNone/>
               <a:defRPr lang="en-US" sz="1300" b="1" spc="400" kern="0" dirty="0">
                 <a:solidFill>
-                  <a:srgbClr val="F2D416"/>
+                  <a:srgbClr val="F2D216"/>
                 </a:solidFill>
               </a:defRPr>
             </a:lvl1pPr>
@@ -1276,7 +1276,7 @@
         <p:spPr>
           <a:xfrm>
             <a:off x="10332720" y="5852160"/>
-            <a:ext cx="1238098" cy="410566"/>
+            <a:ext cx="1302106" cy="410566"/>
           </a:xfrm>
           <a:prstGeom prst="rect">
             <a:avLst/>
@@ -1298,7 +1298,7 @@
             <a:avLst/>
           </a:prstGeom>
           <a:solidFill>
-            <a:srgbClr val="F2D416"/>
+            <a:srgbClr val="F2D216"/>
           </a:solidFill>
           <a:ln/>
         </p:spPr>
@@ -1430,7 +1430,7 @@
         <p:spPr>
           <a:xfrm>
             <a:off x="10716768" y="6053328"/>
-            <a:ext cx="904342" cy="299923"/>
+            <a:ext cx="950976" cy="299923"/>
           </a:xfrm>
           <a:prstGeom prst="rect">
             <a:avLst/>
@@ -1564,7 +1564,7 @@
         <p:spPr>
           <a:xfrm>
             <a:off x="10716768" y="6053328"/>
-            <a:ext cx="904342" cy="299923"/>
+            <a:ext cx="950976" cy="299923"/>
           </a:xfrm>
           <a:prstGeom prst="rect">
             <a:avLst/>
@@ -1668,7 +1668,7 @@
               <a:buNone/>
               <a:defRPr lang="en-US" sz="6000" dirty="0">
                 <a:solidFill>
-                  <a:srgbClr val="F2D416"/>
+                  <a:srgbClr val="F2D216"/>
                 </a:solidFill>
               </a:defRPr>
             </a:lvl1pPr>
@@ -1737,7 +1737,7 @@
         <p:spPr>
           <a:xfrm>
             <a:off x="10332720" y="5760720"/>
-            <a:ext cx="1238098" cy="410566"/>
+            <a:ext cx="1302106" cy="410566"/>
           </a:xfrm>
           <a:prstGeom prst="rect">
             <a:avLst/>
@@ -1759,7 +1759,7 @@
             <a:avLst/>
           </a:prstGeom>
           <a:solidFill>
-            <a:srgbClr val="F2D416"/>
+            <a:srgbClr val="F2D216"/>
           </a:solidFill>
           <a:ln/>
         </p:spPr>
@@ -2239,7 +2239,7 @@
             <a:r>
               <a:rPr lang="en-US" sz="1300" b="1" spc="400" kern="0" dirty="0">
                 <a:solidFill>
-                  <a:srgbClr val="F2D416"/>
+                  <a:srgbClr val="F2D216"/>
                 </a:solidFill>
               </a:rPr>
               <a:t>SECTION 01</a:t>
@@ -2428,7 +2428,7 @@
             <a:avLst/>
           </a:prstGeom>
           <a:solidFill>
-            <a:srgbClr val="F2D416"/>
+            <a:srgbClr val="F2D216"/>
           </a:solidFill>
           <a:ln/>
         </p:spPr>
@@ -2596,7 +2596,7 @@
             <a:avLst/>
           </a:prstGeom>
           <a:solidFill>
-            <a:srgbClr val="F2D416"/>
+            <a:srgbClr val="F2D216"/>
           </a:solidFill>
           <a:ln/>
         </p:spPr>
@@ -2764,7 +2764,7 @@
             <a:avLst/>
           </a:prstGeom>
           <a:solidFill>
-            <a:srgbClr val="F2D416"/>
+            <a:srgbClr val="F2D216"/>
           </a:solidFill>
           <a:ln/>
         </p:spPr>
@@ -3039,7 +3039,7 @@
             <a:r>
               <a:rPr lang="en-US" sz="7600" dirty="0">
                 <a:solidFill>
-                  <a:srgbClr val="F2D416"/>
+                  <a:srgbClr val="F2D216"/>
                 </a:solidFill>
                 <a:latin typeface="Bebas Neue" pitchFamily="34" charset="0"/>
                 <a:ea typeface="Bebas Neue" pitchFamily="34" charset="-122"/>
@@ -3114,7 +3114,7 @@
             <a:r>
               <a:rPr lang="en-US" sz="7600" dirty="0">
                 <a:solidFill>
-                  <a:srgbClr val="F2D416"/>
+                  <a:srgbClr val="F2D216"/>
                 </a:solidFill>
                 <a:latin typeface="Bebas Neue" pitchFamily="34" charset="0"/>
                 <a:ea typeface="Bebas Neue" pitchFamily="34" charset="-122"/>
@@ -3189,7 +3189,7 @@
             <a:r>
               <a:rPr lang="en-US" sz="7600" dirty="0">
                 <a:solidFill>
-                  <a:srgbClr val="F2D416"/>
+                  <a:srgbClr val="F2D216"/>
                 </a:solidFill>
                 <a:latin typeface="Bebas Neue" pitchFamily="34" charset="0"/>
                 <a:ea typeface="Bebas Neue" pitchFamily="34" charset="-122"/>
@@ -3264,7 +3264,7 @@
             <a:r>
               <a:rPr lang="en-US" sz="7600" dirty="0">
                 <a:solidFill>
-                  <a:srgbClr val="F2D416"/>
+                  <a:srgbClr val="F2D216"/>
                 </a:solidFill>
                 <a:latin typeface="Bebas Neue" pitchFamily="34" charset="0"/>
                 <a:ea typeface="Bebas Neue" pitchFamily="34" charset="-122"/>
@@ -3459,7 +3459,7 @@
             <a:r>
               <a:rPr lang="en-US" sz="6000" dirty="0">
                 <a:solidFill>
-                  <a:srgbClr val="F2D416"/>
+                  <a:srgbClr val="F2D216"/>
                 </a:solidFill>
               </a:rPr>
               <a:t>JUST WATCH US</a:t>
@@ -3531,7 +3531,7 @@
         <a:srgbClr val="FAF9F6"/>
       </a:lt2>
       <a:accent1>
-        <a:srgbClr val="F2D416"/>
+        <a:srgbClr val="F2D216"/>
       </a:accent1>
       <a:accent2>
         <a:srgbClr val="FFE94F"/>
